--- a/deliverables/夏春长三角战略合作建议方案.pptx
+++ b/deliverables/夏春长三角战略合作建议方案.pptx
@@ -3592,14 +3592,14 @@
               </a:spcAft>
             </a:pPr>
             <a:r>
-              <a:rPr sz="1300" b="0" i="0">
+              <a:rPr sz="1200" b="0" i="0">
                 <a:solidFill>
                   <a:srgbClr val="FFFFFF"/>
                 </a:solidFill>
                 <a:latin typeface="Microsoft YaHei"/>
                 <a:ea typeface="Microsoft YaHei"/>
               </a:rPr>
-              <a:t>提报机构：复旦大学住房政策研究中心   ×   杨浦区科技企业联合会</a:t>
+              <a:t>提报机构：复旦大学住房政策研究中心 × 上海市杨浦区科技企业联合会 × 上海市科技企业联合会</a:t>
             </a:r>
           </a:p>
           <a:p>
@@ -3714,7 +3714,7 @@
                 <a:latin typeface="Microsoft YaHei"/>
                 <a:ea typeface="Microsoft YaHei"/>
               </a:rPr>
-              <a:t>① 长期战略协作 + 3 个月敏感性过渡</a:t>
+              <a:t>① 长期深化合作 + 3 个月适度过渡</a:t>
             </a:r>
           </a:p>
           <a:p>
@@ -3806,7 +3806,7 @@
                 <a:latin typeface="Microsoft YaHei"/>
                 <a:ea typeface="Microsoft YaHei"/>
               </a:rPr>
-              <a:t>③ 依托复旦 + 杨浦科委双背书</a:t>
+              <a:t>③ 依托复旦 + 市 / 区科技企业联合会背书</a:t>
             </a:r>
           </a:p>
           <a:p>
@@ -4862,7 +4862,7 @@
                 <a:latin typeface="Microsoft YaHei"/>
                 <a:ea typeface="Microsoft YaHei"/>
               </a:rPr>
-              <a:t>复旦大学住房政策研究中心  ×  杨浦区科技企业联合会</a:t>
+              <a:t>复旦大学住房政策研究中心 × 上海市杨浦区科技企业联合会 × 上海市科技企业联合会</a:t>
             </a:r>
           </a:p>
         </p:txBody>
@@ -6028,7 +6028,7 @@
                 <a:latin typeface="Microsoft YaHei"/>
                 <a:ea typeface="Microsoft YaHei"/>
               </a:rPr>
-              <a:t>以上关键问题均源自双方沟通纪要“待解决问题”，将在 3 个月过渡期内逐项落定并写入合作备忘录。</a:t>
+              <a:t>以上关键问题为双方前期沟通中的待解决事项，将在三个月适度过渡期内逐项落定并写入合作备忘录。</a:t>
             </a:r>
           </a:p>
         </p:txBody>
@@ -6118,7 +6118,7 @@
                 <a:latin typeface="Microsoft YaHei"/>
                 <a:ea typeface="Microsoft YaHei"/>
               </a:rPr>
-              <a:t>复旦大学住房政策研究中心  ×  杨浦区科技企业联合会</a:t>
+              <a:t>复旦大学住房政策研究中心 × 上海市杨浦区科技企业联合会 × 上海市科技企业联合会</a:t>
             </a:r>
           </a:p>
         </p:txBody>
@@ -6450,7 +6450,7 @@
                 <a:latin typeface="Microsoft YaHei"/>
                 <a:ea typeface="Microsoft YaHei"/>
               </a:rPr>
-              <a:t>三个月过渡期行动计划与下一步</a:t>
+              <a:t>三个月适度过渡期行动计划与下一步</a:t>
             </a:r>
           </a:p>
         </p:txBody>
@@ -6683,7 +6683,7 @@
                 <a:latin typeface="Microsoft YaHei"/>
                 <a:ea typeface="Microsoft YaHei"/>
               </a:rPr>
-              <a:t>• 签署 MOU + 区域授权草案</a:t>
+              <a:t>• 签署 MOU + 区域独家授权草案</a:t>
             </a:r>
           </a:p>
           <a:p>
@@ -7195,7 +7195,7 @@
                 <a:latin typeface="Microsoft YaHei"/>
                 <a:ea typeface="Microsoft YaHei"/>
               </a:rPr>
-              <a:t>复盘与转正</a:t>
+              <a:t>复盘与转长期</a:t>
             </a:r>
           </a:p>
         </p:txBody>
@@ -7264,7 +7264,7 @@
                 <a:latin typeface="Microsoft YaHei"/>
                 <a:ea typeface="Microsoft YaHei"/>
               </a:rPr>
-              <a:t>• 财务复盘与满意度评估</a:t>
+              <a:t>• 运作复盘与双方磨合评估</a:t>
             </a:r>
           </a:p>
           <a:p>
@@ -7287,7 +7287,7 @@
                 <a:latin typeface="Microsoft YaHei"/>
                 <a:ea typeface="Microsoft YaHei"/>
               </a:rPr>
-              <a:t>• 达标转长期独家评估</a:t>
+              <a:t>• 过渡顺畅 → 自动转长期</a:t>
             </a:r>
           </a:p>
         </p:txBody>
@@ -7431,7 +7431,7 @@
                 <a:latin typeface="Microsoft YaHei"/>
                 <a:ea typeface="Microsoft YaHei"/>
               </a:rPr>
-              <a:t>：确认过渡期授权范围与首场活动档期 → 组建联合微信群同步进度（呼应纪要待办）→ 会签合作备忘录。</a:t>
+              <a:t>：确认过渡期独家授权范围与首场活动档期 → 组建联合微信群同步进度 → 会签合作备忘录。</a:t>
             </a:r>
           </a:p>
           <a:p>
@@ -7544,7 +7544,7 @@
                 <a:latin typeface="Microsoft YaHei"/>
                 <a:ea typeface="Microsoft YaHei"/>
               </a:rPr>
-              <a:t>复旦大学住房政策研究中心  ×  杨浦区科技企业联合会</a:t>
+              <a:t>复旦大学住房政策研究中心 × 上海市杨浦区科技企业联合会 × 上海市科技企业联合会</a:t>
             </a:r>
           </a:p>
         </p:txBody>
@@ -7848,14 +7848,14 @@
               </a:spcAft>
             </a:pPr>
             <a:r>
-              <a:rPr sz="1500" b="0" i="0">
+              <a:rPr sz="1300" b="0" i="0">
                 <a:solidFill>
                   <a:srgbClr val="FFFFFF"/>
                 </a:solidFill>
                 <a:latin typeface="Microsoft YaHei"/>
                 <a:ea typeface="Microsoft YaHei"/>
               </a:rPr>
-              <a:t>复旦大学住房政策研究中心   ×   杨浦区科技企业联合会</a:t>
+              <a:t>复旦大学住房政策研究中心 × 上海市杨浦区科技企业联合会 × 上海市科技企业联合会</a:t>
             </a:r>
           </a:p>
           <a:p>
@@ -10124,7 +10124,7 @@
                 <a:latin typeface="Microsoft YaHei"/>
                 <a:ea typeface="Microsoft YaHei"/>
               </a:rPr>
-              <a:t>复旦大学住房政策研究中心  ×  杨浦区科技企业联合会</a:t>
+              <a:t>复旦大学住房政策研究中心 × 上海市杨浦区科技企业联合会 × 上海市科技企业联合会</a:t>
             </a:r>
           </a:p>
         </p:txBody>
@@ -11198,7 +11198,7 @@
                 <a:latin typeface="Microsoft YaHei"/>
                 <a:ea typeface="Microsoft YaHei"/>
               </a:rPr>
-              <a:t>窗口已现（源自双方沟通纪要）</a:t>
+              <a:t>窗口已现 · 前期已充分沟通</a:t>
             </a:r>
           </a:p>
         </p:txBody>
@@ -11244,7 +11244,7 @@
                 <a:latin typeface="Microsoft YaHei"/>
                 <a:ea typeface="Microsoft YaHei"/>
               </a:rPr>
-              <a:t>会议纪要已明确香港游学窗口期（中东资金、RWA 虚拟货币）、科技企业参访（AI / 科技前沿）等方向，且看重复旦 / 科委背书突破企业与高校资源——与我方禀赋精准匹配。</a:t>
+              <a:t>双方前期沟通已明确香港游学窗口期（中东资金、RWA 虚拟货币）、科技企业参访（AI / 科技前沿）等方向，且看重复旦 + 市 / 区科技企业联合会背书突破企业与高校资源——与我方禀赋精准匹配。</a:t>
             </a:r>
           </a:p>
         </p:txBody>
@@ -11334,7 +11334,7 @@
                 <a:latin typeface="Microsoft YaHei"/>
                 <a:ea typeface="Microsoft YaHei"/>
               </a:rPr>
-              <a:t>复旦大学住房政策研究中心  ×  杨浦区科技企业联合会</a:t>
+              <a:t>复旦大学住房政策研究中心 × 上海市杨浦区科技企业联合会 × 上海市科技企业联合会</a:t>
             </a:r>
           </a:p>
         </p:txBody>
@@ -11712,7 +11712,7 @@
                 <a:latin typeface="Microsoft YaHei"/>
                 <a:ea typeface="Microsoft YaHei"/>
               </a:rPr>
-              <a:t>说明：以下语录摘自夏春先生公开访谈 / 公众号 · 视频号内容，并结合双方沟通纪要，提炼为长三角合作切入点。</a:t>
+              <a:t>说明：以下语录摘自夏春先生公开访谈 / 公众号 · 视频号内容，并结合双方前期沟通，提炼为长三角合作切入点。</a:t>
             </a:r>
           </a:p>
         </p:txBody>
@@ -12395,7 +12395,7 @@
                 <a:latin typeface="Microsoft YaHei"/>
                 <a:ea typeface="Microsoft YaHei"/>
               </a:rPr>
-              <a:t>直接呼应纪要中的香港游学 RWA / 中东资金窗口期。</a:t>
+              <a:t>直接呼应双方共同关注的香港游学 RWA / 中东资金窗口期。</a:t>
             </a:r>
           </a:p>
         </p:txBody>
@@ -13068,7 +13068,7 @@
                 <a:latin typeface="Microsoft YaHei"/>
                 <a:ea typeface="Microsoft YaHei"/>
               </a:rPr>
-              <a:t>（纪要）“香港游学需夏春博士全程参与；方案由夏春主导决策。”</a:t>
+              <a:t>（前期沟通）“香港游学需夏春先生全程参与；方案由夏春先生主导决策。”</a:t>
             </a:r>
           </a:p>
         </p:txBody>
@@ -13260,7 +13260,7 @@
                 <a:latin typeface="Microsoft YaHei"/>
                 <a:ea typeface="Microsoft YaHei"/>
               </a:rPr>
-              <a:t>复旦大学住房政策研究中心  ×  杨浦区科技企业联合会</a:t>
+              <a:t>复旦大学住房政策研究中心 × 上海市杨浦区科技企业联合会 × 上海市科技企业联合会</a:t>
             </a:r>
           </a:p>
         </p:txBody>
@@ -13982,14 +13982,14 @@
               </a:spcAft>
             </a:pPr>
             <a:r>
-              <a:rPr sz="1700" b="1" i="0">
+              <a:rPr sz="1500" b="1" i="0">
                 <a:solidFill>
                   <a:srgbClr val="FFFFFF"/>
                 </a:solidFill>
                 <a:latin typeface="Microsoft YaHei"/>
                 <a:ea typeface="Microsoft YaHei"/>
               </a:rPr>
-              <a:t>杨浦区科技企业联合会</a:t>
+              <a:t>上海市杨浦区科技企业联合会（为主）</a:t>
             </a:r>
           </a:p>
         </p:txBody>
@@ -14058,7 +14058,7 @@
                 <a:latin typeface="Microsoft YaHei"/>
                 <a:ea typeface="Microsoft YaHei"/>
               </a:rPr>
-              <a:t>• 科技企业参访的本地落地与组织能力（呼应纪要重点）</a:t>
+              <a:t>• 科技企业参访的本地落地与组织能力</a:t>
             </a:r>
           </a:p>
           <a:p>
@@ -14081,7 +14081,7 @@
                 <a:latin typeface="Microsoft YaHei"/>
                 <a:ea typeface="Microsoft YaHei"/>
               </a:rPr>
-              <a:t>• 政府侧资源与产业对接，服务科创企业家客群</a:t>
+              <a:t>• 联合上海市科技企业联合会，市 / 区两级协同、资源更广</a:t>
             </a:r>
           </a:p>
           <a:p>
@@ -14261,7 +14261,7 @@
                 <a:latin typeface="Microsoft YaHei"/>
                 <a:ea typeface="Microsoft YaHei"/>
               </a:rPr>
-              <a:t>学术公信力（复旦） + 科创产业落地（杨浦科委） + 长三角本地网络，一站式解决夏春线下承接与机构化运营缺口，</a:t>
+              <a:t>学术公信力（复旦） + 科创产业落地（市 / 区科技企业联合会） + 长三角本地网络，一站式解决夏春线下承接与机构化运营缺口，</a:t>
             </a:r>
           </a:p>
           <a:p>
@@ -14374,7 +14374,7 @@
                 <a:latin typeface="Microsoft YaHei"/>
                 <a:ea typeface="Microsoft YaHei"/>
               </a:rPr>
-              <a:t>复旦大学住房政策研究中心  ×  杨浦区科技企业联合会</a:t>
+              <a:t>复旦大学住房政策研究中心 × 上海市杨浦区科技企业联合会 × 上海市科技企业联合会</a:t>
             </a:r>
           </a:p>
         </p:txBody>
@@ -15454,7 +15454,7 @@
                 <a:latin typeface="Microsoft YaHei"/>
                 <a:ea typeface="Microsoft YaHei"/>
               </a:rPr>
-              <a:t>复旦大学住房政策研究中心  ×  杨浦区科技企业联合会</a:t>
+              <a:t>复旦大学住房政策研究中心 × 上海市杨浦区科技企业联合会 × 上海市科技企业联合会</a:t>
             </a:r>
           </a:p>
         </p:txBody>
@@ -17902,7 +17902,7 @@
                 <a:latin typeface="Microsoft YaHei"/>
                 <a:ea typeface="Microsoft YaHei"/>
               </a:rPr>
-              <a:t>复旦 + 杨浦科委 双背书 + 本地网络</a:t>
+              <a:t>复旦 + 市 / 区科技企业联合会 背书 + 本地网络</a:t>
             </a:r>
           </a:p>
         </p:txBody>
@@ -18040,7 +18040,7 @@
                 <a:latin typeface="Microsoft YaHei"/>
                 <a:ea typeface="Microsoft YaHei"/>
               </a:rPr>
-              <a:t>原则：不争夺存量、聚焦区域增量；边界清晰，与新老团队互补而非重叠（呼应纪要中“主导权 / 客户归属需界定”）。</a:t>
+              <a:t>原则：不争夺存量、聚焦区域增量；边界清晰，与新老团队互补而非重叠（明确主导权 / 客户归属）。</a:t>
             </a:r>
           </a:p>
         </p:txBody>
@@ -18130,7 +18130,7 @@
                 <a:latin typeface="Microsoft YaHei"/>
                 <a:ea typeface="Microsoft YaHei"/>
               </a:rPr>
-              <a:t>复旦大学住房政策研究中心  ×  杨浦区科技企业联合会</a:t>
+              <a:t>复旦大学住房政策研究中心 × 上海市杨浦区科技企业联合会 × 上海市科技企业联合会</a:t>
             </a:r>
           </a:p>
         </p:txBody>
@@ -18603,7 +18603,7 @@
                 <a:latin typeface="Microsoft YaHei"/>
                 <a:ea typeface="Microsoft YaHei"/>
               </a:rPr>
-              <a:t>短期过渡 · 约 3 个月（敏感性适配期）</a:t>
+              <a:t>适度过渡 · 约 3 个月（双方适应与适配）</a:t>
             </a:r>
           </a:p>
         </p:txBody>
@@ -18649,7 +18649,7 @@
                 <a:latin typeface="Microsoft YaHei"/>
                 <a:ea typeface="Microsoft YaHei"/>
               </a:rPr>
-              <a:t>• 小步验证：单场跑通盈利模型，控风险</a:t>
+              <a:t>• 双方适应与适配，建立信任与协作机制</a:t>
             </a:r>
           </a:p>
           <a:p>
@@ -18672,7 +18672,7 @@
                 <a:latin typeface="Microsoft YaHei"/>
                 <a:ea typeface="Microsoft YaHei"/>
               </a:rPr>
-              <a:t>• 建立信任与协作机制、明确对接人</a:t>
+              <a:t>• 小步落地：单场跑通盈利模型，控风险</a:t>
             </a:r>
           </a:p>
           <a:p>
@@ -18695,7 +18695,7 @@
                 <a:latin typeface="Microsoft YaHei"/>
                 <a:ea typeface="Microsoft YaHei"/>
               </a:rPr>
-              <a:t>• 界定客户归属与分润规则</a:t>
+              <a:t>• 界定客户归属与收益分配规则</a:t>
             </a:r>
           </a:p>
           <a:p>
@@ -18718,7 +18718,7 @@
                 <a:latin typeface="Microsoft YaHei"/>
                 <a:ea typeface="Microsoft YaHei"/>
               </a:rPr>
-              <a:t>• 签署合作备忘录（MOU）与区域授权草案</a:t>
+              <a:t>• 签署合作备忘录（MOU）与区域独家授权草案</a:t>
             </a:r>
           </a:p>
           <a:p>
@@ -18741,7 +18741,7 @@
                 <a:latin typeface="Microsoft YaHei"/>
                 <a:ea typeface="Microsoft YaHei"/>
               </a:rPr>
-              <a:t>• 敏感事项分步试探，随时可回调</a:t>
+              <a:t>• 敏感事项分步磨合，节奏可控</a:t>
             </a:r>
           </a:p>
         </p:txBody>
@@ -18951,6 +18951,29 @@
                 <a:latin typeface="Microsoft YaHei"/>
                 <a:ea typeface="Microsoft YaHei"/>
               </a:rPr>
+              <a:t>• 收益分配清晰、数据共享，持续深化合作</a:t>
+            </a:r>
+          </a:p>
+          <a:p>
+            <a:pPr algn="l">
+              <a:lnSpc>
+                <a:spcPct val="150000"/>
+              </a:lnSpc>
+              <a:spcBef>
+                <a:spcPts val="0"/>
+              </a:spcBef>
+              <a:spcAft>
+                <a:spcPts val="600"/>
+              </a:spcAft>
+            </a:pPr>
+            <a:r>
+              <a:rPr sz="1200" b="0" i="0">
+                <a:solidFill>
+                  <a:srgbClr val="5B6470"/>
+                </a:solidFill>
+                <a:latin typeface="Microsoft YaHei"/>
+                <a:ea typeface="Microsoft YaHei"/>
+              </a:rPr>
               <a:t>• 共建长三角会员生态与 CRM 系统</a:t>
             </a:r>
           </a:p>
@@ -18975,29 +18998,6 @@
                 <a:ea typeface="Microsoft YaHei"/>
               </a:rPr>
               <a:t>• 年度活动 / 内容 / 游学 IP 化与品牌联合</a:t>
-            </a:r>
-          </a:p>
-          <a:p>
-            <a:pPr algn="l">
-              <a:lnSpc>
-                <a:spcPct val="150000"/>
-              </a:lnSpc>
-              <a:spcBef>
-                <a:spcPts val="0"/>
-              </a:spcBef>
-              <a:spcAft>
-                <a:spcPts val="600"/>
-              </a:spcAft>
-            </a:pPr>
-            <a:r>
-              <a:rPr sz="1200" b="0" i="0">
-                <a:solidFill>
-                  <a:srgbClr val="5B6470"/>
-                </a:solidFill>
-                <a:latin typeface="Microsoft YaHei"/>
-                <a:ea typeface="Microsoft YaHei"/>
-              </a:rPr>
-              <a:t>• 收益与数据共享、共同扩张</a:t>
             </a:r>
           </a:p>
           <a:p>
@@ -19110,17 +19110,17 @@
                 <a:latin typeface="Microsoft YaHei"/>
                 <a:ea typeface="Microsoft YaHei"/>
               </a:rPr>
-              <a:t>转正门槛（KPI Gate）：</a:t>
-            </a:r>
-            <a:r>
-              <a:rPr sz="1300" b="0" i="0">
+              <a:t>过渡与转长期安排：</a:t>
+            </a:r>
+            <a:r>
+              <a:rPr sz="1250" b="0" i="0">
                 <a:solidFill>
                   <a:srgbClr val="142A4A"/>
                 </a:solidFill>
                 <a:latin typeface="Microsoft YaHei"/>
                 <a:ea typeface="Microsoft YaHei"/>
               </a:rPr>
-              <a:t>3 个月内完成 ≥3 场活动、达成营收 / 毛利 / 满意度阈值，即由过渡期自动转为长期区域独家。</a:t>
+              <a:t>三个月为双方适应与适配的适度过渡期；期间运作顺畅、无重大问题，即自动转为长期区域独家总代理，无需另设考核门槛。</a:t>
             </a:r>
           </a:p>
         </p:txBody>
@@ -19210,7 +19210,7 @@
                 <a:latin typeface="Microsoft YaHei"/>
                 <a:ea typeface="Microsoft YaHei"/>
               </a:rPr>
-              <a:t>复旦大学住房政策研究中心  ×  杨浦区科技企业联合会</a:t>
+              <a:t>复旦大学住房政策研究中心 × 上海市杨浦区科技企业联合会 × 上海市科技企业联合会</a:t>
             </a:r>
           </a:p>
         </p:txBody>
@@ -20527,7 +20527,7 @@
                 <a:latin typeface="Microsoft YaHei"/>
                 <a:ea typeface="Microsoft YaHei"/>
               </a:rPr>
-              <a:t>复旦住房政策中心 + 杨浦科委，承接企业内训与高规格政企对话。</a:t>
+              <a:t>复旦住房政策中心 + 市 / 区科技企业联合会，承接企业内训与高规格政企对话。</a:t>
             </a:r>
           </a:p>
         </p:txBody>
@@ -20814,7 +20814,7 @@
                 <a:latin typeface="Microsoft YaHei"/>
                 <a:ea typeface="Microsoft YaHei"/>
               </a:rPr>
-              <a:t>复旦大学住房政策研究中心  ×  杨浦区科技企业联合会</a:t>
+              <a:t>复旦大学住房政策研究中心 × 上海市杨浦区科技企业联合会 × 上海市科技企业联合会</a:t>
             </a:r>
           </a:p>
         </p:txBody>
